--- a/dist/초5/수학/곱셈과어림/초5_수학_곱셈과어림_03_분수와자연수의곱셈.pptx
+++ b/dist/초5/수학/곱셈과어림/초5_수학_곱셈과어림_03_분수와자연수의곱셈.pptx
@@ -121,13 +121,13 @@
   <p:extLst>
     <p:ext uri="{521415D9-36F7-43E2-AB2F-B90AF26B5E84}">
       <p14:sectionLst xmlns:p14="http://schemas.microsoft.com/office/powerpoint/2010/main">
-        <p14:section name="도입" id="{c0a8e9dd-6908-6d9b-895c-b8690b03ec93}">
+        <p14:section name="도입" id="{f3f6083b-c002-2c2d-d23d-89dc956da77b}">
           <p14:sldIdLst>
             <p14:sldId id="256"/>
             <p14:sldId id="257"/>
           </p14:sldIdLst>
         </p14:section>
-        <p14:section name="개념" id="{c18438a1-7fa2-71e2-96c5-b50619c8a45c}">
+        <p14:section name="개념" id="{1cd234de-79fa-39b8-6bf5-6ffe6289dc81}">
           <p14:sldIdLst>
             <p14:sldId id="258"/>
             <p14:sldId id="259"/>
@@ -136,32 +136,32 @@
             <p14:sldId id="263"/>
           </p14:sldIdLst>
         </p14:section>
-        <p14:section name="연습" id="{34951422-50c6-8cfe-f9a4-6ff8e65dd0be}">
+        <p14:section name="연습" id="{62d7ae1d-1543-41b1-5620-406aae86a92b}">
           <p14:sldIdLst>
             <p14:sldId id="261"/>
             <p14:sldId id="264"/>
             <p14:sldId id="265"/>
           </p14:sldIdLst>
         </p14:section>
-        <p14:section name="개념" id="{aaac51aa-a6d6-106f-d18b-9490a4469a4e}">
+        <p14:section name="개념" id="{0197f0d7-3f07-fa9b-5db8-d45c6ef41912}">
           <p14:sldIdLst/>
         </p14:section>
-        <p14:section name="연습" id="{e4dfda3a-d698-c58b-df4f-e9f3617d5d45}">
+        <p14:section name="연습" id="{d0afe2ec-250c-e8b6-0dc0-51982476219c}">
           <p14:sldIdLst/>
         </p14:section>
-        <p14:section name="확인" id="{f2145864-964a-8c1f-711a-8cff194439d1}">
+        <p14:section name="확인" id="{8a5321f1-bf01-5808-bc38-fa235e24a040}">
           <p14:sldIdLst>
             <p14:sldId id="266"/>
             <p14:sldId id="267"/>
             <p14:sldId id="268"/>
           </p14:sldIdLst>
         </p14:section>
-        <p14:section name="정리" id="{c69e8666-5563-a0c6-d24b-9826efd14824}">
+        <p14:section name="정리" id="{a3986449-8de4-2005-645c-536f88634b5a}">
           <p14:sldIdLst>
             <p14:sldId id="269"/>
           </p14:sldIdLst>
         </p14:section>
-        <p14:section name="보충" id="{4a13c718-e484-dcdb-0ca9-79efdb8031af}">
+        <p14:section name="보충" id="{aae33c03-ef6d-5e1c-1104-021d29fbf29c}">
           <p14:sldIdLst>
             <p14:sldId id="270"/>
           </p14:sldIdLst>
